--- a/dads-a4-template/dist/stdfont/STD_A4_Portrait_Template.pptx
+++ b/dads-a4-template/dist/stdfont/STD_A4_Portrait_Template.pptx
@@ -4421,7 +4421,7 @@
         <p:spPr>
           <a:xfrm>
             <a:off x="732000" y="1618200"/>
-            <a:ext cx="6096000" cy="576000"/>
+            <a:ext cx="6096000" cy="575760"/>
           </a:xfrm>
           <a:prstGeom prst="rect">
             <a:avLst/>
@@ -4458,7 +4458,7 @@
                 <a:ea typeface="+mn-ea"/>
                 <a:cs typeface="+mn-cs"/>
               </a:rPr>
-              <a:t>書体は和文に BIZ UDPGothic、欧文に Arial を使用します（いずれもPCに標準搭載され、WindowsとMacで書体名が一致します）。サイズはデジタル庁デザインシステムのテキストスタイル（CSS px）を 0.75 倍して pt に換算した値です。</a:t>
+              <a:t>書体は和文 BIZ UDPGothic／欧文 Arial。サイズは CSS px を 0.75 倍して pt に換算した値です。</a:t>
             </a:r>
           </a:p>
         </p:txBody>
@@ -4471,7 +4471,7 @@
         </p:nvSpPr>
         <p:spPr>
           <a:xfrm>
-            <a:off x="732000" y="2266200"/>
+            <a:off x="732000" y="2270160"/>
             <a:ext cx="1080000" cy="784080"/>
           </a:xfrm>
           <a:prstGeom prst="rect">
@@ -4522,7 +4522,7 @@
         </p:nvSpPr>
         <p:spPr>
           <a:xfrm>
-            <a:off x="1956000" y="2266200"/>
+            <a:off x="1956000" y="2270160"/>
             <a:ext cx="3144000" cy="784080"/>
           </a:xfrm>
           <a:prstGeom prst="rect">
@@ -4573,7 +4573,7 @@
         </p:nvSpPr>
         <p:spPr>
           <a:xfrm>
-            <a:off x="5172000" y="2266200"/>
+            <a:off x="5172000" y="2270160"/>
             <a:ext cx="1656000" cy="784080"/>
           </a:xfrm>
           <a:prstGeom prst="rect">
@@ -4624,7 +4624,7 @@
         </p:nvSpPr>
         <p:spPr>
           <a:xfrm>
-            <a:off x="732000" y="3088380"/>
+            <a:off x="732000" y="3092340"/>
             <a:ext cx="6096000" cy="5400"/>
           </a:xfrm>
           <a:prstGeom prst="rect">
@@ -4651,7 +4651,7 @@
         </p:nvSpPr>
         <p:spPr>
           <a:xfrm>
-            <a:off x="732000" y="3126480"/>
+            <a:off x="732000" y="3130440"/>
             <a:ext cx="1080000" cy="601200"/>
           </a:xfrm>
           <a:prstGeom prst="rect">
@@ -4702,7 +4702,7 @@
         </p:nvSpPr>
         <p:spPr>
           <a:xfrm>
-            <a:off x="1956000" y="3126480"/>
+            <a:off x="1956000" y="3130440"/>
             <a:ext cx="3144000" cy="601200"/>
           </a:xfrm>
           <a:prstGeom prst="rect">
@@ -4753,7 +4753,7 @@
         </p:nvSpPr>
         <p:spPr>
           <a:xfrm>
-            <a:off x="5172000" y="3126480"/>
+            <a:off x="5172000" y="3130440"/>
             <a:ext cx="1656000" cy="601200"/>
           </a:xfrm>
           <a:prstGeom prst="rect">
@@ -4804,7 +4804,7 @@
         </p:nvSpPr>
         <p:spPr>
           <a:xfrm>
-            <a:off x="732000" y="3765780"/>
+            <a:off x="732000" y="3769740"/>
             <a:ext cx="6096000" cy="5400"/>
           </a:xfrm>
           <a:prstGeom prst="rect">
@@ -4831,7 +4831,7 @@
         </p:nvSpPr>
         <p:spPr>
           <a:xfrm>
-            <a:off x="732000" y="3803880"/>
+            <a:off x="732000" y="3807840"/>
             <a:ext cx="1080000" cy="486900"/>
           </a:xfrm>
           <a:prstGeom prst="rect">
@@ -4882,7 +4882,7 @@
         </p:nvSpPr>
         <p:spPr>
           <a:xfrm>
-            <a:off x="1956000" y="3803880"/>
+            <a:off x="1956000" y="3807840"/>
             <a:ext cx="3144000" cy="486900"/>
           </a:xfrm>
           <a:prstGeom prst="rect">
@@ -4933,7 +4933,7 @@
         </p:nvSpPr>
         <p:spPr>
           <a:xfrm>
-            <a:off x="5172000" y="3803880"/>
+            <a:off x="5172000" y="3807840"/>
             <a:ext cx="1656000" cy="486900"/>
           </a:xfrm>
           <a:prstGeom prst="rect">
@@ -4984,7 +4984,7 @@
         </p:nvSpPr>
         <p:spPr>
           <a:xfrm>
-            <a:off x="732000" y="4328880"/>
+            <a:off x="732000" y="4332840"/>
             <a:ext cx="6096000" cy="5400"/>
           </a:xfrm>
           <a:prstGeom prst="rect">
@@ -5011,7 +5011,7 @@
         </p:nvSpPr>
         <p:spPr>
           <a:xfrm>
-            <a:off x="732000" y="4366980"/>
+            <a:off x="732000" y="4370940"/>
             <a:ext cx="1080000" cy="429750"/>
           </a:xfrm>
           <a:prstGeom prst="rect">
@@ -5062,7 +5062,7 @@
         </p:nvSpPr>
         <p:spPr>
           <a:xfrm>
-            <a:off x="1956000" y="4366980"/>
+            <a:off x="1956000" y="4370940"/>
             <a:ext cx="3144000" cy="429750"/>
           </a:xfrm>
           <a:prstGeom prst="rect">
@@ -5113,7 +5113,7 @@
         </p:nvSpPr>
         <p:spPr>
           <a:xfrm>
-            <a:off x="5172000" y="4366980"/>
+            <a:off x="5172000" y="4370940"/>
             <a:ext cx="1656000" cy="429750"/>
           </a:xfrm>
           <a:prstGeom prst="rect">
@@ -5164,7 +5164,7 @@
         </p:nvSpPr>
         <p:spPr>
           <a:xfrm>
-            <a:off x="732000" y="4834830"/>
+            <a:off x="732000" y="4838790"/>
             <a:ext cx="6096000" cy="5400"/>
           </a:xfrm>
           <a:prstGeom prst="rect">
@@ -5191,7 +5191,7 @@
         </p:nvSpPr>
         <p:spPr>
           <a:xfrm>
-            <a:off x="732000" y="4872930"/>
+            <a:off x="732000" y="4876890"/>
             <a:ext cx="1080000" cy="403080"/>
           </a:xfrm>
           <a:prstGeom prst="rect">
@@ -5242,7 +5242,7 @@
         </p:nvSpPr>
         <p:spPr>
           <a:xfrm>
-            <a:off x="1956000" y="4872930"/>
+            <a:off x="1956000" y="4876890"/>
             <a:ext cx="3144000" cy="403080"/>
           </a:xfrm>
           <a:prstGeom prst="rect">
@@ -5293,7 +5293,7 @@
         </p:nvSpPr>
         <p:spPr>
           <a:xfrm>
-            <a:off x="5172000" y="4872930"/>
+            <a:off x="5172000" y="4876890"/>
             <a:ext cx="1656000" cy="403080"/>
           </a:xfrm>
           <a:prstGeom prst="rect">
@@ -5344,7 +5344,7 @@
         </p:nvSpPr>
         <p:spPr>
           <a:xfrm>
-            <a:off x="732000" y="5314110"/>
+            <a:off x="732000" y="5318070"/>
             <a:ext cx="6096000" cy="5400"/>
           </a:xfrm>
           <a:prstGeom prst="rect">
@@ -5371,7 +5371,7 @@
         </p:nvSpPr>
         <p:spPr>
           <a:xfrm>
-            <a:off x="732000" y="5352210"/>
+            <a:off x="732000" y="5356170"/>
             <a:ext cx="1080000" cy="403080"/>
           </a:xfrm>
           <a:prstGeom prst="rect">
@@ -5422,7 +5422,7 @@
         </p:nvSpPr>
         <p:spPr>
           <a:xfrm>
-            <a:off x="1956000" y="5352210"/>
+            <a:off x="1956000" y="5356170"/>
             <a:ext cx="3144000" cy="403080"/>
           </a:xfrm>
           <a:prstGeom prst="rect">
@@ -5473,7 +5473,7 @@
         </p:nvSpPr>
         <p:spPr>
           <a:xfrm>
-            <a:off x="5172000" y="5352210"/>
+            <a:off x="5172000" y="5356170"/>
             <a:ext cx="1656000" cy="403080"/>
           </a:xfrm>
           <a:prstGeom prst="rect">
@@ -5524,7 +5524,7 @@
         </p:nvSpPr>
         <p:spPr>
           <a:xfrm>
-            <a:off x="732000" y="5793390"/>
+            <a:off x="732000" y="5797350"/>
             <a:ext cx="6096000" cy="5400"/>
           </a:xfrm>
           <a:prstGeom prst="rect">
@@ -5551,7 +5551,7 @@
         </p:nvSpPr>
         <p:spPr>
           <a:xfrm>
-            <a:off x="732000" y="5831490"/>
+            <a:off x="732000" y="5835450"/>
             <a:ext cx="1080000" cy="317355"/>
           </a:xfrm>
           <a:prstGeom prst="rect">
@@ -5602,7 +5602,7 @@
         </p:nvSpPr>
         <p:spPr>
           <a:xfrm>
-            <a:off x="1956000" y="5831490"/>
+            <a:off x="1956000" y="5835450"/>
             <a:ext cx="3144000" cy="317355"/>
           </a:xfrm>
           <a:prstGeom prst="rect">
@@ -5653,7 +5653,7 @@
         </p:nvSpPr>
         <p:spPr>
           <a:xfrm>
-            <a:off x="5172000" y="5831490"/>
+            <a:off x="5172000" y="5835450"/>
             <a:ext cx="1656000" cy="317355"/>
           </a:xfrm>
           <a:prstGeom prst="rect">
@@ -5704,7 +5704,7 @@
         </p:nvSpPr>
         <p:spPr>
           <a:xfrm>
-            <a:off x="732000" y="6186945"/>
+            <a:off x="732000" y="6190905"/>
             <a:ext cx="6096000" cy="5400"/>
           </a:xfrm>
           <a:prstGeom prst="rect">
@@ -5731,7 +5731,7 @@
         </p:nvSpPr>
         <p:spPr>
           <a:xfrm>
-            <a:off x="732000" y="6453645"/>
+            <a:off x="732000" y="6457605"/>
             <a:ext cx="6096000" cy="2520000"/>
           </a:xfrm>
           <a:prstGeom prst="rect">
